--- a/examples/mphf-net/mphf_net_rebuild.pptx
+++ b/examples/mphf-net/mphf_net_rebuild.pptx
@@ -3576,8 +3576,8 @@
         </p:nvSpPr>
         <p:spPr>
           <a:xfrm>
-            <a:off x="2270125" y="1254125"/>
-            <a:ext cx="269875" cy="63500"/>
+            <a:off x="2301875" y="1190625"/>
+            <a:ext cx="285750" cy="63500"/>
           </a:xfrm>
           <a:prstGeom prst="rect">
             <a:avLst/>
@@ -3620,8 +3620,8 @@
         </p:nvSpPr>
         <p:spPr>
           <a:xfrm>
-            <a:off x="2270125" y="1317625"/>
-            <a:ext cx="269875" cy="206375"/>
+            <a:off x="2301875" y="1254125"/>
+            <a:ext cx="285750" cy="238125"/>
           </a:xfrm>
           <a:prstGeom prst="rect">
             <a:avLst/>
@@ -3664,8 +3664,8 @@
         </p:nvSpPr>
         <p:spPr>
           <a:xfrm>
-            <a:off x="2540000" y="1317625"/>
-            <a:ext cx="63500" cy="206375"/>
+            <a:off x="2587625" y="1254125"/>
+            <a:ext cx="63500" cy="238125"/>
           </a:xfrm>
           <a:prstGeom prst="rect">
             <a:avLst/>
@@ -3708,8 +3708,8 @@
         </p:nvSpPr>
         <p:spPr>
           <a:xfrm>
-            <a:off x="2159000" y="1476375"/>
-            <a:ext cx="381000" cy="63500"/>
+            <a:off x="2143125" y="1444625"/>
+            <a:ext cx="412750" cy="63500"/>
           </a:xfrm>
           <a:prstGeom prst="rect">
             <a:avLst/>
@@ -3752,8 +3752,8 @@
         </p:nvSpPr>
         <p:spPr>
           <a:xfrm>
-            <a:off x="2159000" y="1539875"/>
-            <a:ext cx="381000" cy="301625"/>
+            <a:off x="2143125" y="1508125"/>
+            <a:ext cx="412750" cy="365125"/>
           </a:xfrm>
           <a:prstGeom prst="rect">
             <a:avLst/>
@@ -3796,8 +3796,8 @@
         </p:nvSpPr>
         <p:spPr>
           <a:xfrm>
-            <a:off x="2540000" y="1539875"/>
-            <a:ext cx="63500" cy="301625"/>
+            <a:off x="2555875" y="1508125"/>
+            <a:ext cx="63500" cy="365125"/>
           </a:xfrm>
           <a:prstGeom prst="rect">
             <a:avLst/>
@@ -3840,8 +3840,8 @@
         </p:nvSpPr>
         <p:spPr>
           <a:xfrm>
-            <a:off x="2032000" y="1778000"/>
-            <a:ext cx="508000" cy="63500"/>
+            <a:off x="1968500" y="1841500"/>
+            <a:ext cx="555625" cy="63500"/>
           </a:xfrm>
           <a:prstGeom prst="rect">
             <a:avLst/>
@@ -3884,8 +3884,8 @@
         </p:nvSpPr>
         <p:spPr>
           <a:xfrm>
-            <a:off x="2032000" y="1841500"/>
-            <a:ext cx="508000" cy="396875"/>
+            <a:off x="1968500" y="1905000"/>
+            <a:ext cx="555625" cy="508000"/>
           </a:xfrm>
           <a:prstGeom prst="rect">
             <a:avLst/>
@@ -3928,8 +3928,8 @@
         </p:nvSpPr>
         <p:spPr>
           <a:xfrm>
-            <a:off x="2540000" y="1841500"/>
-            <a:ext cx="63500" cy="396875"/>
+            <a:off x="2524125" y="1905000"/>
+            <a:ext cx="63500" cy="508000"/>
           </a:xfrm>
           <a:prstGeom prst="rect">
             <a:avLst/>
@@ -3972,8 +3972,8 @@
         </p:nvSpPr>
         <p:spPr>
           <a:xfrm>
-            <a:off x="1905000" y="2190750"/>
-            <a:ext cx="650875" cy="63500"/>
+            <a:off x="1762125" y="2349500"/>
+            <a:ext cx="762000" cy="63500"/>
           </a:xfrm>
           <a:prstGeom prst="rect">
             <a:avLst/>
@@ -4016,8 +4016,8 @@
         </p:nvSpPr>
         <p:spPr>
           <a:xfrm>
-            <a:off x="1905000" y="2254250"/>
-            <a:ext cx="650875" cy="492125"/>
+            <a:off x="1762125" y="2413000"/>
+            <a:ext cx="762000" cy="666750"/>
           </a:xfrm>
           <a:prstGeom prst="rect">
             <a:avLst/>
@@ -4060,8 +4060,8 @@
         </p:nvSpPr>
         <p:spPr>
           <a:xfrm>
-            <a:off x="2555875" y="2254250"/>
-            <a:ext cx="63500" cy="492125"/>
+            <a:off x="2524125" y="2413000"/>
+            <a:ext cx="63500" cy="666750"/>
           </a:xfrm>
           <a:prstGeom prst="rect">
             <a:avLst/>
@@ -4138,7 +4138,7 @@
         </p:nvSpPr>
         <p:spPr>
           <a:xfrm>
-            <a:off x="3143250" y="1492250"/>
+            <a:off x="3143250" y="1516062"/>
             <a:ext cx="460375" cy="349250"/>
           </a:xfrm>
           <a:prstGeom prst="roundRect">
@@ -4186,7 +4186,7 @@
         </p:nvSpPr>
         <p:spPr>
           <a:xfrm>
-            <a:off x="3143250" y="1524000"/>
+            <a:off x="3143250" y="1547812"/>
             <a:ext cx="460375" cy="158750"/>
           </a:xfrm>
           <a:prstGeom prst="rect">
@@ -4220,7 +4220,7 @@
         </p:nvSpPr>
         <p:spPr>
           <a:xfrm>
-            <a:off x="3143250" y="1666875"/>
+            <a:off x="3143250" y="1690687"/>
             <a:ext cx="460375" cy="142875"/>
           </a:xfrm>
           <a:prstGeom prst="rect">
@@ -4254,8 +4254,8 @@
         </p:nvCxnSpPr>
         <p:spPr>
           <a:xfrm>
-            <a:off x="2635250" y="1666875"/>
-            <a:ext cx="508000" cy="0"/>
+            <a:off x="2619375" y="1690687"/>
+            <a:ext cx="523875" cy="0"/>
           </a:xfrm>
           <a:prstGeom prst="line">
             <a:avLst/>
@@ -4290,7 +4290,7 @@
         </p:nvSpPr>
         <p:spPr>
           <a:xfrm>
-            <a:off x="3143250" y="2127250"/>
+            <a:off x="3143250" y="1984375"/>
             <a:ext cx="460375" cy="349250"/>
           </a:xfrm>
           <a:prstGeom prst="roundRect">
@@ -4338,7 +4338,7 @@
         </p:nvSpPr>
         <p:spPr>
           <a:xfrm>
-            <a:off x="3143250" y="2159000"/>
+            <a:off x="3143250" y="2016125"/>
             <a:ext cx="460375" cy="158750"/>
           </a:xfrm>
           <a:prstGeom prst="rect">
@@ -4372,7 +4372,7 @@
         </p:nvSpPr>
         <p:spPr>
           <a:xfrm>
-            <a:off x="3143250" y="2301875"/>
+            <a:off x="3143250" y="2159000"/>
             <a:ext cx="460375" cy="142875"/>
           </a:xfrm>
           <a:prstGeom prst="rect">
@@ -4406,8 +4406,8 @@
         </p:nvCxnSpPr>
         <p:spPr>
           <a:xfrm>
-            <a:off x="2635250" y="2301875"/>
-            <a:ext cx="508000" cy="0"/>
+            <a:off x="2587625" y="2159000"/>
+            <a:ext cx="555625" cy="0"/>
           </a:xfrm>
           <a:prstGeom prst="line">
             <a:avLst/>
@@ -4442,7 +4442,7 @@
         </p:nvSpPr>
         <p:spPr>
           <a:xfrm>
-            <a:off x="3143250" y="2873375"/>
+            <a:off x="3143250" y="2571750"/>
             <a:ext cx="460375" cy="349250"/>
           </a:xfrm>
           <a:prstGeom prst="roundRect">
@@ -4490,7 +4490,7 @@
         </p:nvSpPr>
         <p:spPr>
           <a:xfrm>
-            <a:off x="3143250" y="2905125"/>
+            <a:off x="3143250" y="2603500"/>
             <a:ext cx="460375" cy="158750"/>
           </a:xfrm>
           <a:prstGeom prst="rect">
@@ -4524,7 +4524,7 @@
         </p:nvSpPr>
         <p:spPr>
           <a:xfrm>
-            <a:off x="3143250" y="3048000"/>
+            <a:off x="3143250" y="2746375"/>
             <a:ext cx="460375" cy="142875"/>
           </a:xfrm>
           <a:prstGeom prst="rect">
@@ -4558,8 +4558,8 @@
         </p:nvCxnSpPr>
         <p:spPr>
           <a:xfrm>
-            <a:off x="2635250" y="3048000"/>
-            <a:ext cx="508000" cy="0"/>
+            <a:off x="2587625" y="2746375"/>
+            <a:ext cx="555625" cy="0"/>
           </a:xfrm>
           <a:prstGeom prst="line">
             <a:avLst/>
@@ -6669,7 +6669,7 @@
         <p:spPr>
           <a:xfrm>
             <a:off x="4540250" y="1444625"/>
-            <a:ext cx="206375" cy="190500"/>
+            <a:ext cx="230187" cy="206375"/>
           </a:xfrm>
           <a:prstGeom prst="line">
             <a:avLst/>
@@ -6704,8 +6704,8 @@
         </p:nvCxnSpPr>
         <p:spPr>
           <a:xfrm>
-            <a:off x="4778375" y="1897062"/>
-            <a:ext cx="0" cy="198438"/>
+            <a:off x="4778375" y="1873250"/>
+            <a:ext cx="0" cy="246062"/>
           </a:xfrm>
           <a:prstGeom prst="line">
             <a:avLst/>
@@ -6741,7 +6741,7 @@
         <p:spPr>
           <a:xfrm>
             <a:off x="4349750" y="2222500"/>
-            <a:ext cx="293687" cy="0"/>
+            <a:ext cx="325437" cy="0"/>
           </a:xfrm>
           <a:prstGeom prst="line">
             <a:avLst/>
@@ -6776,8 +6776,8 @@
         </p:nvCxnSpPr>
         <p:spPr>
           <a:xfrm>
-            <a:off x="4905375" y="2222500"/>
-            <a:ext cx="333375" cy="0"/>
+            <a:off x="4881562" y="2222500"/>
+            <a:ext cx="357188" cy="0"/>
           </a:xfrm>
           <a:prstGeom prst="line">
             <a:avLst/>
@@ -6812,8 +6812,8 @@
         </p:nvCxnSpPr>
         <p:spPr>
           <a:xfrm>
-            <a:off x="4778375" y="2865437"/>
-            <a:ext cx="0" cy="341313"/>
+            <a:off x="4778375" y="2841625"/>
+            <a:ext cx="0" cy="388937"/>
           </a:xfrm>
           <a:prstGeom prst="line">
             <a:avLst/>
@@ -6849,7 +6849,7 @@
         <p:spPr>
           <a:xfrm>
             <a:off x="4349750" y="3341687"/>
-            <a:ext cx="293687" cy="0"/>
+            <a:ext cx="325437" cy="0"/>
           </a:xfrm>
           <a:prstGeom prst="line">
             <a:avLst/>
@@ -6884,8 +6884,8 @@
         </p:nvCxnSpPr>
         <p:spPr>
           <a:xfrm>
-            <a:off x="4905375" y="3333750"/>
-            <a:ext cx="333375" cy="0"/>
+            <a:off x="4881562" y="3333750"/>
+            <a:ext cx="357188" cy="0"/>
           </a:xfrm>
           <a:prstGeom prst="line">
             <a:avLst/>
@@ -6920,8 +6920,8 @@
         </p:nvCxnSpPr>
         <p:spPr>
           <a:xfrm flipV="1">
-            <a:off x="5969000" y="1476375"/>
-            <a:ext cx="984250" cy="746125"/>
+            <a:off x="5969000" y="1500187"/>
+            <a:ext cx="1023937" cy="722313"/>
           </a:xfrm>
           <a:prstGeom prst="line">
             <a:avLst/>
@@ -6957,7 +6957,7 @@
         <p:spPr>
           <a:xfrm>
             <a:off x="5969000" y="3333750"/>
-            <a:ext cx="976312" cy="325437"/>
+            <a:ext cx="1023937" cy="325437"/>
           </a:xfrm>
           <a:prstGeom prst="line">
             <a:avLst/>
@@ -6992,8 +6992,8 @@
         </p:nvCxnSpPr>
         <p:spPr>
           <a:xfrm flipV="1">
-            <a:off x="7207250" y="1397000"/>
-            <a:ext cx="444500" cy="47625"/>
+            <a:off x="7183437" y="1436687"/>
+            <a:ext cx="468313" cy="7938"/>
           </a:xfrm>
           <a:prstGeom prst="line">
             <a:avLst/>
@@ -7028,8 +7028,8 @@
         </p:nvCxnSpPr>
         <p:spPr>
           <a:xfrm flipV="1">
-            <a:off x="7207250" y="2667000"/>
-            <a:ext cx="444500" cy="47625"/>
+            <a:off x="7183437" y="2706687"/>
+            <a:ext cx="468313" cy="7938"/>
           </a:xfrm>
           <a:prstGeom prst="line">
             <a:avLst/>
@@ -7064,8 +7064,8 @@
         </p:nvCxnSpPr>
         <p:spPr>
           <a:xfrm flipV="1">
-            <a:off x="7207250" y="3667125"/>
-            <a:ext cx="444500" cy="47625"/>
+            <a:off x="7183437" y="3706812"/>
+            <a:ext cx="468313" cy="7938"/>
           </a:xfrm>
           <a:prstGeom prst="line">
             <a:avLst/>
@@ -7100,8 +7100,8 @@
         </p:nvCxnSpPr>
         <p:spPr>
           <a:xfrm>
-            <a:off x="7080250" y="1571625"/>
-            <a:ext cx="0" cy="214312"/>
+            <a:off x="7080250" y="1547812"/>
+            <a:ext cx="0" cy="261938"/>
           </a:xfrm>
           <a:prstGeom prst="line">
             <a:avLst/>
@@ -7136,8 +7136,8 @@
         </p:nvCxnSpPr>
         <p:spPr>
           <a:xfrm>
-            <a:off x="7080250" y="2055812"/>
-            <a:ext cx="0" cy="214313"/>
+            <a:off x="7080250" y="2032000"/>
+            <a:ext cx="0" cy="254000"/>
           </a:xfrm>
           <a:prstGeom prst="line">
             <a:avLst/>
@@ -7172,8 +7172,8 @@
         </p:nvCxnSpPr>
         <p:spPr>
           <a:xfrm>
-            <a:off x="7080250" y="2508250"/>
-            <a:ext cx="0" cy="79375"/>
+            <a:off x="7080250" y="2492375"/>
+            <a:ext cx="0" cy="119062"/>
           </a:xfrm>
           <a:prstGeom prst="line">
             <a:avLst/>
@@ -7208,8 +7208,8 @@
         </p:nvCxnSpPr>
         <p:spPr>
           <a:xfrm>
-            <a:off x="7080250" y="2841625"/>
-            <a:ext cx="0" cy="230187"/>
+            <a:off x="7080250" y="2817812"/>
+            <a:ext cx="0" cy="277813"/>
           </a:xfrm>
           <a:prstGeom prst="line">
             <a:avLst/>
@@ -7244,8 +7244,8 @@
         </p:nvCxnSpPr>
         <p:spPr>
           <a:xfrm>
-            <a:off x="7080250" y="3341687"/>
-            <a:ext cx="0" cy="246063"/>
+            <a:off x="7080250" y="3317875"/>
+            <a:ext cx="0" cy="293687"/>
           </a:xfrm>
           <a:prstGeom prst="line">
             <a:avLst/>
@@ -8718,6 +8718,7 @@
             <a:solidFill>
               <a:srgbClr val="2550D8"/>
             </a:solidFill>
+            <a:prstDash val="dash"/>
           </a:ln>
           <a:effectLst/>
         </p:spPr>
@@ -9998,7 +9999,7 @@
           <a:prstGeom prst="line">
             <a:avLst/>
           </a:prstGeom>
-          <a:ln w="31750">
+          <a:ln w="50800">
             <a:solidFill>
               <a:srgbClr val="2550D8"/>
             </a:solidFill>
@@ -10034,7 +10035,7 @@
           <a:prstGeom prst="line">
             <a:avLst/>
           </a:prstGeom>
-          <a:ln w="31750">
+          <a:ln w="50800">
             <a:solidFill>
               <a:srgbClr val="2550D8"/>
             </a:solidFill>
@@ -10070,7 +10071,7 @@
           <a:prstGeom prst="line">
             <a:avLst/>
           </a:prstGeom>
-          <a:ln w="31750">
+          <a:ln w="50800">
             <a:solidFill>
               <a:srgbClr val="2550D8"/>
             </a:solidFill>
@@ -14694,9 +14695,9 @@
           <p:nvPr/>
         </p:nvCxnSpPr>
         <p:spPr>
-          <a:xfrm flipV="1">
-            <a:off x="4064000" y="7366000"/>
-            <a:ext cx="381000" cy="95250"/>
+          <a:xfrm>
+            <a:off x="4095750" y="7381875"/>
+            <a:ext cx="317500" cy="0"/>
           </a:xfrm>
           <a:prstGeom prst="line">
             <a:avLst/>

--- a/examples/mphf-net/mphf_net_rebuild.pptx
+++ b/examples/mphf-net/mphf_net_rebuild.pptx
@@ -14364,7 +14364,7 @@
         </p:nvSpPr>
         <p:spPr>
           <a:xfrm>
-            <a:off x="4635500" y="7286625"/>
+            <a:off x="4635500" y="7318375"/>
             <a:ext cx="127000" cy="127000"/>
           </a:xfrm>
           <a:prstGeom prst="rect">
@@ -14408,7 +14408,7 @@
         </p:nvSpPr>
         <p:spPr>
           <a:xfrm>
-            <a:off x="4833937" y="7286625"/>
+            <a:off x="4833937" y="7318375"/>
             <a:ext cx="127000" cy="127000"/>
           </a:xfrm>
           <a:prstGeom prst="rect">
@@ -14452,7 +14452,7 @@
         </p:nvSpPr>
         <p:spPr>
           <a:xfrm>
-            <a:off x="5032375" y="7286625"/>
+            <a:off x="5032375" y="7318375"/>
             <a:ext cx="127000" cy="127000"/>
           </a:xfrm>
           <a:prstGeom prst="rect">
@@ -14496,7 +14496,7 @@
         </p:nvSpPr>
         <p:spPr>
           <a:xfrm>
-            <a:off x="5230812" y="7286625"/>
+            <a:off x="5230812" y="7318375"/>
             <a:ext cx="127000" cy="127000"/>
           </a:xfrm>
           <a:prstGeom prst="rect">
@@ -14540,7 +14540,7 @@
         </p:nvSpPr>
         <p:spPr>
           <a:xfrm>
-            <a:off x="5429250" y="7286625"/>
+            <a:off x="5429250" y="7318375"/>
             <a:ext cx="127000" cy="127000"/>
           </a:xfrm>
           <a:prstGeom prst="rect">
@@ -14584,7 +14584,7 @@
         </p:nvSpPr>
         <p:spPr>
           <a:xfrm>
-            <a:off x="5643562" y="7270750"/>
+            <a:off x="5643562" y="7302500"/>
             <a:ext cx="238125" cy="158750"/>
           </a:xfrm>
           <a:prstGeom prst="rect">
@@ -14618,7 +14618,7 @@
         </p:nvSpPr>
         <p:spPr>
           <a:xfrm>
-            <a:off x="5889625" y="7286625"/>
+            <a:off x="5889625" y="7318375"/>
             <a:ext cx="317500" cy="158750"/>
           </a:xfrm>
           <a:prstGeom prst="rect">
@@ -14652,7 +14652,7 @@
         </p:nvSpPr>
         <p:spPr>
           <a:xfrm>
-            <a:off x="6286500" y="7286625"/>
+            <a:off x="6286500" y="7318375"/>
             <a:ext cx="127000" cy="127000"/>
           </a:xfrm>
           <a:prstGeom prst="rect">
@@ -14697,7 +14697,7 @@
         <p:spPr>
           <a:xfrm>
             <a:off x="4095750" y="7381875"/>
-            <a:ext cx="317500" cy="0"/>
+            <a:ext cx="539750" cy="0"/>
           </a:xfrm>
           <a:prstGeom prst="line">
             <a:avLst/>
